--- a/答辩材料/CFI_Agent_presentation.pptx
+++ b/答辩材料/CFI_Agent_presentation.pptx
@@ -3888,7 +3888,7 @@
         <p:spPr>
           <a:xfrm>
             <a:off x="822958" y="5883106"/>
-            <a:ext cx="2187349" cy="548640"/>
+            <a:ext cx="2623815" cy="548640"/>
           </a:xfrm>
           <a:prstGeom prst="roundRect">
             <a:avLst>
@@ -3932,7 +3932,7 @@
         <p:spPr>
           <a:xfrm>
             <a:off x="822959" y="5837387"/>
-            <a:ext cx="2187348" cy="45719"/>
+            <a:ext cx="2623814" cy="45719"/>
           </a:xfrm>
           <a:prstGeom prst="rect">
             <a:avLst/>
@@ -3956,8 +3956,8 @@
         </p:nvSpPr>
         <p:spPr>
           <a:xfrm>
-            <a:off x="893667" y="5961696"/>
-            <a:ext cx="2377440" cy="548640"/>
+            <a:off x="893666" y="5961696"/>
+            <a:ext cx="2609387" cy="548640"/>
           </a:xfrm>
           <a:prstGeom prst="rect">
             <a:avLst/>
@@ -3987,7 +3987,7 @@
                 <a:ea typeface="Microsoft YaHei"/>
                 <a:hlinkClick r:id="rId5" action="ppaction://hlinkfile"/>
               </a:rPr>
-              <a:t>看板动态版</a:t>
+              <a:t>动态版演示视频</a:t>
             </a:r>
             <a:endParaRPr lang="zh-CN" b="1" dirty="0">
               <a:solidFill>
